--- a/Docs/Sesión_3_MFDL.pptx
+++ b/Docs/Sesión_3_MFDL.pptx
@@ -1416,6 +1416,13 @@
         </dgm:presLayoutVars>
       </dgm:prSet>
       <dgm:spPr/>
+      <dgm:t>
+        <a:bodyPr/>
+        <a:lstStyle/>
+        <a:p>
+          <a:endParaRPr lang="es-MX"/>
+        </a:p>
+      </dgm:t>
     </dgm:pt>
     <dgm:pt modelId="{D46FEB50-854E-4E6F-B83A-1F67E4913B1C}" type="pres">
       <dgm:prSet presAssocID="{8A890437-F4FF-41F0-ADF8-F900EADA8E97}" presName="levelTx" presStyleLbl="revTx" presStyleIdx="0" presStyleCnt="0">
@@ -1425,6 +1432,13 @@
         </dgm:presLayoutVars>
       </dgm:prSet>
       <dgm:spPr/>
+      <dgm:t>
+        <a:bodyPr/>
+        <a:lstStyle/>
+        <a:p>
+          <a:endParaRPr lang="es-MX"/>
+        </a:p>
+      </dgm:t>
     </dgm:pt>
     <dgm:pt modelId="{DFF0423A-6718-4C6A-A302-1A0C5D582395}" type="pres">
       <dgm:prSet presAssocID="{31535046-1A60-414C-949F-793FFAE6795E}" presName="Name8" presStyleCnt="0"/>
@@ -1438,6 +1452,13 @@
         </dgm:presLayoutVars>
       </dgm:prSet>
       <dgm:spPr/>
+      <dgm:t>
+        <a:bodyPr/>
+        <a:lstStyle/>
+        <a:p>
+          <a:endParaRPr lang="es-MX"/>
+        </a:p>
+      </dgm:t>
     </dgm:pt>
     <dgm:pt modelId="{2F06EC7A-A7BC-4CF6-B512-9318FF5323BC}" type="pres">
       <dgm:prSet presAssocID="{31535046-1A60-414C-949F-793FFAE6795E}" presName="levelTx" presStyleLbl="revTx" presStyleIdx="0" presStyleCnt="0">
@@ -1447,6 +1468,13 @@
         </dgm:presLayoutVars>
       </dgm:prSet>
       <dgm:spPr/>
+      <dgm:t>
+        <a:bodyPr/>
+        <a:lstStyle/>
+        <a:p>
+          <a:endParaRPr lang="es-MX"/>
+        </a:p>
+      </dgm:t>
     </dgm:pt>
     <dgm:pt modelId="{0A641585-378B-4692-A9D6-898790ABBA37}" type="pres">
       <dgm:prSet presAssocID="{968F4057-AAE4-41AE-955F-FDBE5821D922}" presName="Name8" presStyleCnt="0"/>
@@ -1460,6 +1488,13 @@
         </dgm:presLayoutVars>
       </dgm:prSet>
       <dgm:spPr/>
+      <dgm:t>
+        <a:bodyPr/>
+        <a:lstStyle/>
+        <a:p>
+          <a:endParaRPr lang="es-MX"/>
+        </a:p>
+      </dgm:t>
     </dgm:pt>
     <dgm:pt modelId="{0E05B3C9-2ED2-4708-9633-33E991ADF0DE}" type="pres">
       <dgm:prSet presAssocID="{968F4057-AAE4-41AE-955F-FDBE5821D922}" presName="levelTx" presStyleLbl="revTx" presStyleIdx="0" presStyleCnt="0">
@@ -1469,6 +1504,13 @@
         </dgm:presLayoutVars>
       </dgm:prSet>
       <dgm:spPr/>
+      <dgm:t>
+        <a:bodyPr/>
+        <a:lstStyle/>
+        <a:p>
+          <a:endParaRPr lang="es-MX"/>
+        </a:p>
+      </dgm:t>
     </dgm:pt>
     <dgm:pt modelId="{24A2802C-7F04-45F2-9473-B386CA676C87}" type="pres">
       <dgm:prSet presAssocID="{5F0A4C81-DF61-4B58-8C90-7DFFEB58A74F}" presName="Name8" presStyleCnt="0"/>
@@ -1482,6 +1524,13 @@
         </dgm:presLayoutVars>
       </dgm:prSet>
       <dgm:spPr/>
+      <dgm:t>
+        <a:bodyPr/>
+        <a:lstStyle/>
+        <a:p>
+          <a:endParaRPr lang="es-MX"/>
+        </a:p>
+      </dgm:t>
     </dgm:pt>
     <dgm:pt modelId="{8B539A8B-3664-4492-81E9-9E64CF2A1998}" type="pres">
       <dgm:prSet presAssocID="{5F0A4C81-DF61-4B58-8C90-7DFFEB58A74F}" presName="levelTx" presStyleLbl="revTx" presStyleIdx="0" presStyleCnt="0">
@@ -1491,6 +1540,13 @@
         </dgm:presLayoutVars>
       </dgm:prSet>
       <dgm:spPr/>
+      <dgm:t>
+        <a:bodyPr/>
+        <a:lstStyle/>
+        <a:p>
+          <a:endParaRPr lang="es-MX"/>
+        </a:p>
+      </dgm:t>
     </dgm:pt>
     <dgm:pt modelId="{47D49D45-E2E4-4E84-8DF0-144F6F2AAE44}" type="pres">
       <dgm:prSet presAssocID="{BAB9CF25-B930-4A5C-9824-35DBFCD09781}" presName="Name8" presStyleCnt="0"/>
@@ -1504,6 +1560,13 @@
         </dgm:presLayoutVars>
       </dgm:prSet>
       <dgm:spPr/>
+      <dgm:t>
+        <a:bodyPr/>
+        <a:lstStyle/>
+        <a:p>
+          <a:endParaRPr lang="es-MX"/>
+        </a:p>
+      </dgm:t>
     </dgm:pt>
     <dgm:pt modelId="{E3869635-9088-428C-9A2C-D31A7AC76330}" type="pres">
       <dgm:prSet presAssocID="{BAB9CF25-B930-4A5C-9824-35DBFCD09781}" presName="levelTx" presStyleLbl="revTx" presStyleIdx="0" presStyleCnt="0">
@@ -1513,28 +1576,35 @@
         </dgm:presLayoutVars>
       </dgm:prSet>
       <dgm:spPr/>
+      <dgm:t>
+        <a:bodyPr/>
+        <a:lstStyle/>
+        <a:p>
+          <a:endParaRPr lang="es-MX"/>
+        </a:p>
+      </dgm:t>
     </dgm:pt>
   </dgm:ptLst>
   <dgm:cxnLst>
+    <dgm:cxn modelId="{AA889C8E-A0C1-4F93-9106-138D727736C0}" type="presOf" srcId="{DCF9999D-8F50-4115-8A35-27FD5021DED0}" destId="{A7891F6C-321A-412A-988C-3F2EFDFC63DE}" srcOrd="0" destOrd="0" presId="urn:microsoft.com/office/officeart/2005/8/layout/pyramid1"/>
     <dgm:cxn modelId="{060F3693-F80E-4639-A18B-A4E618CAB40C}" srcId="{DCF9999D-8F50-4115-8A35-27FD5021DED0}" destId="{3C02B3F5-AF95-4A93-B4EC-620972A56717}" srcOrd="0" destOrd="0" parTransId="{8245CE6E-A103-46B1-AEEB-EEB3EB12DE47}" sibTransId="{B3451074-5AD8-4D7B-901C-2A1DE3CD520A}"/>
     <dgm:cxn modelId="{695A3E0D-9CE4-4F36-A922-0B3C34DA10E0}" type="presOf" srcId="{31535046-1A60-414C-949F-793FFAE6795E}" destId="{CD0ACCF6-FEA4-4E64-B6D4-5E68A80BC2BB}" srcOrd="0" destOrd="0" presId="urn:microsoft.com/office/officeart/2005/8/layout/pyramid1"/>
+    <dgm:cxn modelId="{542A92FA-B456-4EF3-98A1-D32261934888}" type="presOf" srcId="{3C02B3F5-AF95-4A93-B4EC-620972A56717}" destId="{D35F3287-6F6B-4B96-A2F5-B2A6012A195F}" srcOrd="0" destOrd="0" presId="urn:microsoft.com/office/officeart/2005/8/layout/pyramid1"/>
+    <dgm:cxn modelId="{4968A8AE-0ACE-43C6-AB7A-CBB79AC00EB1}" srcId="{DCF9999D-8F50-4115-8A35-27FD5021DED0}" destId="{8A890437-F4FF-41F0-ADF8-F900EADA8E97}" srcOrd="1" destOrd="0" parTransId="{DC1D566D-7A59-4E0C-9678-62EE4741B173}" sibTransId="{5F7A6A6A-5DD7-42B5-9064-97516999758E}"/>
+    <dgm:cxn modelId="{18E4B65C-6293-4F97-B629-80897AF734F3}" type="presOf" srcId="{8A890437-F4FF-41F0-ADF8-F900EADA8E97}" destId="{D46FEB50-854E-4E6F-B83A-1F67E4913B1C}" srcOrd="1" destOrd="0" presId="urn:microsoft.com/office/officeart/2005/8/layout/pyramid1"/>
+    <dgm:cxn modelId="{BE4FAD6A-68D4-4109-8F76-18431E8F857E}" type="presOf" srcId="{BAB9CF25-B930-4A5C-9824-35DBFCD09781}" destId="{E3869635-9088-428C-9A2C-D31A7AC76330}" srcOrd="1" destOrd="0" presId="urn:microsoft.com/office/officeart/2005/8/layout/pyramid1"/>
+    <dgm:cxn modelId="{3876E36A-F3F2-4611-B9CA-860CACA3619F}" type="presOf" srcId="{31535046-1A60-414C-949F-793FFAE6795E}" destId="{2F06EC7A-A7BC-4CF6-B512-9318FF5323BC}" srcOrd="1" destOrd="0" presId="urn:microsoft.com/office/officeart/2005/8/layout/pyramid1"/>
+    <dgm:cxn modelId="{CA746BE3-747B-4BAE-A06A-92BEA0B4D0A5}" srcId="{DCF9999D-8F50-4115-8A35-27FD5021DED0}" destId="{31535046-1A60-414C-949F-793FFAE6795E}" srcOrd="2" destOrd="0" parTransId="{B19E7C5D-CE51-4370-A434-80678AF01891}" sibTransId="{0BADFF60-D9A8-419D-99FD-14002ADDB2DC}"/>
+    <dgm:cxn modelId="{C6277BC0-718B-4C5C-87CD-619A58912060}" type="presOf" srcId="{3C02B3F5-AF95-4A93-B4EC-620972A56717}" destId="{A4D65BB8-77B0-44C5-892D-12825F748E98}" srcOrd="1" destOrd="0" presId="urn:microsoft.com/office/officeart/2005/8/layout/pyramid1"/>
+    <dgm:cxn modelId="{75768292-C840-48C7-97E1-786523A8C5EF}" type="presOf" srcId="{8A890437-F4FF-41F0-ADF8-F900EADA8E97}" destId="{EA7E1869-AC6F-4D7C-8EBE-E93A117DEE3B}" srcOrd="0" destOrd="0" presId="urn:microsoft.com/office/officeart/2005/8/layout/pyramid1"/>
+    <dgm:cxn modelId="{3838B912-4817-41D9-AE39-5AD2E5E7D171}" srcId="{DCF9999D-8F50-4115-8A35-27FD5021DED0}" destId="{968F4057-AAE4-41AE-955F-FDBE5821D922}" srcOrd="3" destOrd="0" parTransId="{0B0A4430-6073-42C6-9CCD-EA91DF1FE5FA}" sibTransId="{281D82A7-0430-4007-A346-956F3619E040}"/>
     <dgm:cxn modelId="{561A0F27-6C18-4283-BB6A-F0172CA54306}" srcId="{DCF9999D-8F50-4115-8A35-27FD5021DED0}" destId="{5F0A4C81-DF61-4B58-8C90-7DFFEB58A74F}" srcOrd="4" destOrd="0" parTransId="{D6FDCBF2-41FD-4CEC-AE99-020A8BC3D3D2}" sibTransId="{C4250E1A-EBFA-4EFD-BE9A-A91BC43F49A3}"/>
+    <dgm:cxn modelId="{F9CBE953-13A2-4C23-97F6-11B5B7B2BF56}" type="presOf" srcId="{BAB9CF25-B930-4A5C-9824-35DBFCD09781}" destId="{66D3CA2F-1BFA-42C1-A938-B7571E249809}" srcOrd="0" destOrd="0" presId="urn:microsoft.com/office/officeart/2005/8/layout/pyramid1"/>
+    <dgm:cxn modelId="{126B92D0-E02B-4E46-AEA9-A0AB2F374044}" srcId="{DCF9999D-8F50-4115-8A35-27FD5021DED0}" destId="{BAB9CF25-B930-4A5C-9824-35DBFCD09781}" srcOrd="5" destOrd="0" parTransId="{A59F2E68-51D3-48C3-9778-12515D6F10C0}" sibTransId="{856C2433-4712-47FB-B395-9B71750587FB}"/>
     <dgm:cxn modelId="{870B79C3-1943-4EFC-AF92-3D60E7FA2114}" type="presOf" srcId="{5F0A4C81-DF61-4B58-8C90-7DFFEB58A74F}" destId="{C322A5A9-947A-43A1-82D8-194BD2BA4246}" srcOrd="0" destOrd="0" presId="urn:microsoft.com/office/officeart/2005/8/layout/pyramid1"/>
-    <dgm:cxn modelId="{126B92D0-E02B-4E46-AEA9-A0AB2F374044}" srcId="{DCF9999D-8F50-4115-8A35-27FD5021DED0}" destId="{BAB9CF25-B930-4A5C-9824-35DBFCD09781}" srcOrd="5" destOrd="0" parTransId="{A59F2E68-51D3-48C3-9778-12515D6F10C0}" sibTransId="{856C2433-4712-47FB-B395-9B71750587FB}"/>
     <dgm:cxn modelId="{A997168B-3C99-4420-8128-5DD5614475A0}" type="presOf" srcId="{968F4057-AAE4-41AE-955F-FDBE5821D922}" destId="{0E05B3C9-2ED2-4708-9633-33E991ADF0DE}" srcOrd="1" destOrd="0" presId="urn:microsoft.com/office/officeart/2005/8/layout/pyramid1"/>
-    <dgm:cxn modelId="{18E4B65C-6293-4F97-B629-80897AF734F3}" type="presOf" srcId="{8A890437-F4FF-41F0-ADF8-F900EADA8E97}" destId="{D46FEB50-854E-4E6F-B83A-1F67E4913B1C}" srcOrd="1" destOrd="0" presId="urn:microsoft.com/office/officeart/2005/8/layout/pyramid1"/>
-    <dgm:cxn modelId="{3838B912-4817-41D9-AE39-5AD2E5E7D171}" srcId="{DCF9999D-8F50-4115-8A35-27FD5021DED0}" destId="{968F4057-AAE4-41AE-955F-FDBE5821D922}" srcOrd="3" destOrd="0" parTransId="{0B0A4430-6073-42C6-9CCD-EA91DF1FE5FA}" sibTransId="{281D82A7-0430-4007-A346-956F3619E040}"/>
-    <dgm:cxn modelId="{F9CBE953-13A2-4C23-97F6-11B5B7B2BF56}" type="presOf" srcId="{BAB9CF25-B930-4A5C-9824-35DBFCD09781}" destId="{66D3CA2F-1BFA-42C1-A938-B7571E249809}" srcOrd="0" destOrd="0" presId="urn:microsoft.com/office/officeart/2005/8/layout/pyramid1"/>
     <dgm:cxn modelId="{0253A7E7-3686-4139-8F93-11A3653178B7}" type="presOf" srcId="{5F0A4C81-DF61-4B58-8C90-7DFFEB58A74F}" destId="{8B539A8B-3664-4492-81E9-9E64CF2A1998}" srcOrd="1" destOrd="0" presId="urn:microsoft.com/office/officeart/2005/8/layout/pyramid1"/>
-    <dgm:cxn modelId="{3876E36A-F3F2-4611-B9CA-860CACA3619F}" type="presOf" srcId="{31535046-1A60-414C-949F-793FFAE6795E}" destId="{2F06EC7A-A7BC-4CF6-B512-9318FF5323BC}" srcOrd="1" destOrd="0" presId="urn:microsoft.com/office/officeart/2005/8/layout/pyramid1"/>
-    <dgm:cxn modelId="{4968A8AE-0ACE-43C6-AB7A-CBB79AC00EB1}" srcId="{DCF9999D-8F50-4115-8A35-27FD5021DED0}" destId="{8A890437-F4FF-41F0-ADF8-F900EADA8E97}" srcOrd="1" destOrd="0" parTransId="{DC1D566D-7A59-4E0C-9678-62EE4741B173}" sibTransId="{5F7A6A6A-5DD7-42B5-9064-97516999758E}"/>
-    <dgm:cxn modelId="{75768292-C840-48C7-97E1-786523A8C5EF}" type="presOf" srcId="{8A890437-F4FF-41F0-ADF8-F900EADA8E97}" destId="{EA7E1869-AC6F-4D7C-8EBE-E93A117DEE3B}" srcOrd="0" destOrd="0" presId="urn:microsoft.com/office/officeart/2005/8/layout/pyramid1"/>
-    <dgm:cxn modelId="{542A92FA-B456-4EF3-98A1-D32261934888}" type="presOf" srcId="{3C02B3F5-AF95-4A93-B4EC-620972A56717}" destId="{D35F3287-6F6B-4B96-A2F5-B2A6012A195F}" srcOrd="0" destOrd="0" presId="urn:microsoft.com/office/officeart/2005/8/layout/pyramid1"/>
-    <dgm:cxn modelId="{AA889C8E-A0C1-4F93-9106-138D727736C0}" type="presOf" srcId="{DCF9999D-8F50-4115-8A35-27FD5021DED0}" destId="{A7891F6C-321A-412A-988C-3F2EFDFC63DE}" srcOrd="0" destOrd="0" presId="urn:microsoft.com/office/officeart/2005/8/layout/pyramid1"/>
     <dgm:cxn modelId="{B46FE3F4-D1E5-4DCA-8677-AB591F072690}" type="presOf" srcId="{968F4057-AAE4-41AE-955F-FDBE5821D922}" destId="{13E52E1D-F5DA-49DF-817D-E628D3F481C4}" srcOrd="0" destOrd="0" presId="urn:microsoft.com/office/officeart/2005/8/layout/pyramid1"/>
-    <dgm:cxn modelId="{C6277BC0-718B-4C5C-87CD-619A58912060}" type="presOf" srcId="{3C02B3F5-AF95-4A93-B4EC-620972A56717}" destId="{A4D65BB8-77B0-44C5-892D-12825F748E98}" srcOrd="1" destOrd="0" presId="urn:microsoft.com/office/officeart/2005/8/layout/pyramid1"/>
-    <dgm:cxn modelId="{CA746BE3-747B-4BAE-A06A-92BEA0B4D0A5}" srcId="{DCF9999D-8F50-4115-8A35-27FD5021DED0}" destId="{31535046-1A60-414C-949F-793FFAE6795E}" srcOrd="2" destOrd="0" parTransId="{B19E7C5D-CE51-4370-A434-80678AF01891}" sibTransId="{0BADFF60-D9A8-419D-99FD-14002ADDB2DC}"/>
-    <dgm:cxn modelId="{BE4FAD6A-68D4-4109-8F76-18431E8F857E}" type="presOf" srcId="{BAB9CF25-B930-4A5C-9824-35DBFCD09781}" destId="{E3869635-9088-428C-9A2C-D31A7AC76330}" srcOrd="1" destOrd="0" presId="urn:microsoft.com/office/officeart/2005/8/layout/pyramid1"/>
     <dgm:cxn modelId="{DE21A5D8-610E-4CFE-B2C4-9AC1872B7051}" type="presParOf" srcId="{A7891F6C-321A-412A-988C-3F2EFDFC63DE}" destId="{8388B2ED-6F37-415B-A6BD-8C97421C316D}" srcOrd="0" destOrd="0" presId="urn:microsoft.com/office/officeart/2005/8/layout/pyramid1"/>
     <dgm:cxn modelId="{4E7A0132-0DE8-4FD6-94B5-195415FE07A5}" type="presParOf" srcId="{8388B2ED-6F37-415B-A6BD-8C97421C316D}" destId="{D35F3287-6F6B-4B96-A2F5-B2A6012A195F}" srcOrd="0" destOrd="0" presId="urn:microsoft.com/office/officeart/2005/8/layout/pyramid1"/>
     <dgm:cxn modelId="{E84F2488-5472-4642-9153-0BC6E82C05BA}" type="presParOf" srcId="{8388B2ED-6F37-415B-A6BD-8C97421C316D}" destId="{A4D65BB8-77B0-44C5-892D-12825F748E98}" srcOrd="1" destOrd="0" presId="urn:microsoft.com/office/officeart/2005/8/layout/pyramid1"/>
@@ -8236,6 +8306,54 @@
           </a:p>
         </p:txBody>
       </p:sp>
+      <p:pic>
+        <p:nvPicPr>
+          <p:cNvPr id="3" name="Imagen 2"/>
+          <p:cNvPicPr>
+            <a:picLocks noChangeAspect="1"/>
+          </p:cNvPicPr>
+          <p:nvPr/>
+        </p:nvPicPr>
+        <p:blipFill>
+          <a:blip r:embed="rId2"/>
+          <a:stretch>
+            <a:fillRect/>
+          </a:stretch>
+        </p:blipFill>
+        <p:spPr>
+          <a:xfrm>
+            <a:off x="742386" y="2316763"/>
+            <a:ext cx="4513355" cy="2871511"/>
+          </a:xfrm>
+          <a:prstGeom prst="rect">
+            <a:avLst/>
+          </a:prstGeom>
+        </p:spPr>
+      </p:pic>
+      <p:pic>
+        <p:nvPicPr>
+          <p:cNvPr id="4" name="Imagen 3"/>
+          <p:cNvPicPr>
+            <a:picLocks noChangeAspect="1"/>
+          </p:cNvPicPr>
+          <p:nvPr/>
+        </p:nvPicPr>
+        <p:blipFill>
+          <a:blip r:embed="rId3"/>
+          <a:stretch>
+            <a:fillRect/>
+          </a:stretch>
+        </p:blipFill>
+        <p:spPr>
+          <a:xfrm>
+            <a:off x="6656172" y="2316763"/>
+            <a:ext cx="4085969" cy="2869535"/>
+          </a:xfrm>
+          <a:prstGeom prst="rect">
+            <a:avLst/>
+          </a:prstGeom>
+        </p:spPr>
+      </p:pic>
     </p:spTree>
     <p:extLst>
       <p:ext uri="{BB962C8B-B14F-4D97-AF65-F5344CB8AC3E}">
@@ -8286,7 +8404,7 @@
           <p:cNvPr id="2" name="Title 1">
             <a:extLst>
               <a:ext uri="{FF2B5EF4-FFF2-40B4-BE49-F238E27FC236}">
-                <a16:creationId xmlns:a16="http://schemas.microsoft.com/office/drawing/2014/main" xmlns="" id="{9178E05F-8E83-BBB4-A381-2A742A868FFC}"/>
+                <a16:creationId xmlns="" xmlns:a16="http://schemas.microsoft.com/office/drawing/2014/main" id="{9178E05F-8E83-BBB4-A381-2A742A868FFC}"/>
               </a:ext>
             </a:extLst>
           </p:cNvPr>
@@ -8322,7 +8440,7 @@
           <p:cNvPr id="4" name="Text Placeholder 3">
             <a:extLst>
               <a:ext uri="{FF2B5EF4-FFF2-40B4-BE49-F238E27FC236}">
-                <a16:creationId xmlns:a16="http://schemas.microsoft.com/office/drawing/2014/main" xmlns="" id="{21D49E75-95E0-382E-CBD0-DB668CB24802}"/>
+                <a16:creationId xmlns="" xmlns:a16="http://schemas.microsoft.com/office/drawing/2014/main" id="{21D49E75-95E0-382E-CBD0-DB668CB24802}"/>
               </a:ext>
             </a:extLst>
           </p:cNvPr>
@@ -8535,7 +8653,7 @@
           <p:cNvPr id="10" name="Text Placeholder 3">
             <a:extLst>
               <a:ext uri="{FF2B5EF4-FFF2-40B4-BE49-F238E27FC236}">
-                <a16:creationId xmlns:a16="http://schemas.microsoft.com/office/drawing/2014/main" xmlns="" id="{21D49E75-95E0-382E-CBD0-DB668CB24802}"/>
+                <a16:creationId xmlns="" xmlns:a16="http://schemas.microsoft.com/office/drawing/2014/main" id="{21D49E75-95E0-382E-CBD0-DB668CB24802}"/>
               </a:ext>
             </a:extLst>
           </p:cNvPr>
@@ -8782,7 +8900,7 @@
           <p:cNvPr id="12" name="Text Placeholder 3">
             <a:extLst>
               <a:ext uri="{FF2B5EF4-FFF2-40B4-BE49-F238E27FC236}">
-                <a16:creationId xmlns:a16="http://schemas.microsoft.com/office/drawing/2014/main" xmlns="" id="{21D49E75-95E0-382E-CBD0-DB668CB24802}"/>
+                <a16:creationId xmlns="" xmlns:a16="http://schemas.microsoft.com/office/drawing/2014/main" id="{21D49E75-95E0-382E-CBD0-DB668CB24802}"/>
               </a:ext>
             </a:extLst>
           </p:cNvPr>
@@ -9029,7 +9147,7 @@
           <p:cNvPr id="14" name="Text Placeholder 3">
             <a:extLst>
               <a:ext uri="{FF2B5EF4-FFF2-40B4-BE49-F238E27FC236}">
-                <a16:creationId xmlns:a16="http://schemas.microsoft.com/office/drawing/2014/main" xmlns="" id="{21D49E75-95E0-382E-CBD0-DB668CB24802}"/>
+                <a16:creationId xmlns="" xmlns:a16="http://schemas.microsoft.com/office/drawing/2014/main" id="{21D49E75-95E0-382E-CBD0-DB668CB24802}"/>
               </a:ext>
             </a:extLst>
           </p:cNvPr>
@@ -9276,7 +9394,7 @@
           <p:cNvPr id="16" name="Text Placeholder 3">
             <a:extLst>
               <a:ext uri="{FF2B5EF4-FFF2-40B4-BE49-F238E27FC236}">
-                <a16:creationId xmlns:a16="http://schemas.microsoft.com/office/drawing/2014/main" xmlns="" id="{21D49E75-95E0-382E-CBD0-DB668CB24802}"/>
+                <a16:creationId xmlns="" xmlns:a16="http://schemas.microsoft.com/office/drawing/2014/main" id="{21D49E75-95E0-382E-CBD0-DB668CB24802}"/>
               </a:ext>
             </a:extLst>
           </p:cNvPr>
@@ -9523,7 +9641,7 @@
           <p:cNvPr id="18" name="Text Placeholder 3">
             <a:extLst>
               <a:ext uri="{FF2B5EF4-FFF2-40B4-BE49-F238E27FC236}">
-                <a16:creationId xmlns:a16="http://schemas.microsoft.com/office/drawing/2014/main" xmlns="" id="{21D49E75-95E0-382E-CBD0-DB668CB24802}"/>
+                <a16:creationId xmlns="" xmlns:a16="http://schemas.microsoft.com/office/drawing/2014/main" id="{21D49E75-95E0-382E-CBD0-DB668CB24802}"/>
               </a:ext>
             </a:extLst>
           </p:cNvPr>
@@ -9770,7 +9888,7 @@
           <p:cNvPr id="24" name="Text Placeholder 3">
             <a:extLst>
               <a:ext uri="{FF2B5EF4-FFF2-40B4-BE49-F238E27FC236}">
-                <a16:creationId xmlns:a16="http://schemas.microsoft.com/office/drawing/2014/main" xmlns="" id="{21D49E75-95E0-382E-CBD0-DB668CB24802}"/>
+                <a16:creationId xmlns="" xmlns:a16="http://schemas.microsoft.com/office/drawing/2014/main" id="{21D49E75-95E0-382E-CBD0-DB668CB24802}"/>
               </a:ext>
             </a:extLst>
           </p:cNvPr>
